--- a/A_B_Split_Test.pptx
+++ b/A_B_Split_Test.pptx
@@ -5,15 +5,17 @@
     <p:sldMasterId id="2147483648" r:id="rId1"/>
   </p:sldMasterIdLst>
   <p:notesMasterIdLst>
-    <p:notesMasterId r:id="rId8"/>
+    <p:notesMasterId r:id="rId10"/>
   </p:notesMasterIdLst>
   <p:sldIdLst>
     <p:sldId id="334" r:id="rId2"/>
-    <p:sldId id="335" r:id="rId3"/>
-    <p:sldId id="339" r:id="rId4"/>
-    <p:sldId id="336" r:id="rId5"/>
-    <p:sldId id="337" r:id="rId6"/>
-    <p:sldId id="338" r:id="rId7"/>
+    <p:sldId id="340" r:id="rId3"/>
+    <p:sldId id="335" r:id="rId4"/>
+    <p:sldId id="341" r:id="rId5"/>
+    <p:sldId id="339" r:id="rId6"/>
+    <p:sldId id="336" r:id="rId7"/>
+    <p:sldId id="337" r:id="rId8"/>
+    <p:sldId id="338" r:id="rId9"/>
   </p:sldIdLst>
   <p:sldSz cx="12192000" cy="6858000"/>
   <p:notesSz cx="6858000" cy="9144000"/>
@@ -3697,8 +3699,8 @@
         </p:nvSpPr>
         <p:spPr>
           <a:xfrm>
-            <a:off x="0" y="76402"/>
-            <a:ext cx="2221044" cy="523220"/>
+            <a:off x="-1" y="76402"/>
+            <a:ext cx="3705101" cy="523220"/>
           </a:xfrm>
           <a:prstGeom prst="rect">
             <a:avLst/>
@@ -3713,7 +3715,7 @@
           <a:p>
             <a:r>
               <a:rPr lang="en-US" sz="2800" b="1" dirty="0"/>
-              <a:t>A/B Split Test</a:t>
+              <a:t>A/B Split Testing</a:t>
             </a:r>
           </a:p>
         </p:txBody>
@@ -3765,7 +3767,7 @@
         <p:spPr>
           <a:xfrm>
             <a:off x="0" y="722733"/>
-            <a:ext cx="5655732" cy="3108543"/>
+            <a:ext cx="5655732" cy="5601533"/>
           </a:xfrm>
           <a:prstGeom prst="rect">
             <a:avLst/>
@@ -3780,6 +3782,28 @@
           <a:p>
             <a:r>
               <a:rPr lang="en-US" sz="1400" dirty="0"/>
+              <a:t>A/B Split testing (a.k.a. split testing) is a process of comparing two approaches of doing something. For example, you may be comparing two designs of landing web pages, or two advertisings, or two coupons, or two emails, etc. You can run the tests, measure the effectiveness of each approach (using some metric) – and compare them.</a:t>
+            </a:r>
+          </a:p>
+          <a:p>
+            <a:endParaRPr lang="en-US" sz="1400" dirty="0"/>
+          </a:p>
+          <a:p>
+            <a:r>
+              <a:rPr lang="en-US" sz="1400" dirty="0"/>
+              <a:t>A/B Split testing was pioneered in early 1900s in statistics (Student t-test) and in advertising (Claude Hopkins – "Scientific Advertising"), and in other areas.</a:t>
+            </a:r>
+          </a:p>
+          <a:p>
+            <a:endParaRPr lang="en-US" sz="1400" dirty="0"/>
+          </a:p>
+          <a:p>
+            <a:r>
+              <a:rPr lang="en-US" sz="1600" b="1" dirty="0">
+                <a:solidFill>
+                  <a:srgbClr val="FF0000"/>
+                </a:solidFill>
+              </a:rPr>
               <a:t>Importance of A/B Split testing:</a:t>
             </a:r>
           </a:p>
@@ -3838,48 +3862,202 @@
             <a:endParaRPr lang="en-US" sz="1400" dirty="0"/>
           </a:p>
           <a:p>
-            <a:r>
-              <a:rPr lang="en-US" sz="1400" dirty="0"/>
-              <a:t> - </a:t>
-            </a:r>
-            <a:r>
-              <a:rPr lang="en-US" sz="1400" dirty="0">
+            <a:pPr marL="285750" indent="-285750">
+              <a:buFont typeface="Arial" panose="020B0604020202020204" pitchFamily="34" charset="0"/>
+              <a:buChar char="•"/>
+            </a:pPr>
+            <a:r>
+              <a:rPr lang="en-US" sz="1200" dirty="0">
                 <a:hlinkClick r:id="rId2"/>
               </a:rPr>
               <a:t>https://towardsdatascience.com/the-art-of-a-b-testing-5a10c9bb70a4</a:t>
             </a:r>
             <a:r>
-              <a:rPr lang="en-US" sz="1400" dirty="0"/>
+              <a:rPr lang="en-US" sz="1200" dirty="0"/>
               <a:t> </a:t>
             </a:r>
           </a:p>
           <a:p>
-            <a:r>
-              <a:rPr lang="en-US" sz="1400" dirty="0"/>
-              <a:t> - </a:t>
-            </a:r>
-            <a:r>
-              <a:rPr lang="en-US" sz="1400" dirty="0">
+            <a:pPr marL="285750" indent="-285750">
+              <a:buFont typeface="Arial" panose="020B0604020202020204" pitchFamily="34" charset="0"/>
+              <a:buChar char="•"/>
+            </a:pPr>
+            <a:r>
+              <a:rPr lang="en-US" sz="1200" dirty="0">
                 <a:hlinkClick r:id="rId3"/>
               </a:rPr>
               <a:t>https://en.wikipedia.org/wiki/A/B_testing</a:t>
             </a:r>
             <a:r>
-              <a:rPr lang="en-US" sz="1400" dirty="0"/>
+              <a:rPr lang="en-US" sz="1200" dirty="0"/>
               <a:t> </a:t>
             </a:r>
           </a:p>
           <a:p>
+            <a:pPr marL="285750" indent="-285750">
+              <a:buFont typeface="Arial" panose="020B0604020202020204" pitchFamily="34" charset="0"/>
+              <a:buChar char="•"/>
+            </a:pPr>
+            <a:r>
+              <a:rPr lang="en-US" sz="1200" dirty="0">
+                <a:hlinkClick r:id="rId4"/>
+              </a:rPr>
+              <a:t>https://towardsdatascience.com/online-controlled-experiment-8-common-pitfalls-and-solutions-ea4488e5a82e</a:t>
+            </a:r>
+            <a:endParaRPr lang="en-US" sz="1200" dirty="0"/>
+          </a:p>
+          <a:p>
             <a:endParaRPr lang="en-US" sz="1400" dirty="0"/>
           </a:p>
         </p:txBody>
       </p:sp>
-      <p:sp>
-        <p:nvSpPr>
-          <p:cNvPr id="10" name="TextBox 9">
-            <a:extLst>
-              <a:ext uri="{FF2B5EF4-FFF2-40B4-BE49-F238E27FC236}">
-                <a16:creationId xmlns:a16="http://schemas.microsoft.com/office/drawing/2014/main" id="{F715B8E9-39AB-D945-BE08-302996794FCE}"/>
+      <p:pic>
+        <p:nvPicPr>
+          <p:cNvPr id="1026" name="Picture 2" descr="25 ways to split (A/B) test your emails | ClickDimensions Blog">
+            <a:extLst>
+              <a:ext uri="{FF2B5EF4-FFF2-40B4-BE49-F238E27FC236}">
+                <a16:creationId xmlns:a16="http://schemas.microsoft.com/office/drawing/2014/main" id="{C79F1130-56EB-0044-97DF-8A2648B7D62E}"/>
+              </a:ext>
+            </a:extLst>
+          </p:cNvPr>
+          <p:cNvPicPr>
+            <a:picLocks noChangeAspect="1" noChangeArrowheads="1"/>
+          </p:cNvPicPr>
+          <p:nvPr/>
+        </p:nvPicPr>
+        <p:blipFill>
+          <a:blip r:embed="rId5" cstate="email">
+            <a:extLst>
+              <a:ext uri="{28A0092B-C50C-407E-A947-70E740481C1C}">
+                <a14:useLocalDpi xmlns:a14="http://schemas.microsoft.com/office/drawing/2010/main"/>
+              </a:ext>
+            </a:extLst>
+          </a:blip>
+          <a:srcRect/>
+          <a:stretch>
+            <a:fillRect/>
+          </a:stretch>
+        </p:blipFill>
+        <p:spPr bwMode="auto">
+          <a:xfrm>
+            <a:off x="7612083" y="3166791"/>
+            <a:ext cx="2740590" cy="1482614"/>
+          </a:xfrm>
+          <a:prstGeom prst="rect">
+            <a:avLst/>
+          </a:prstGeom>
+          <a:noFill/>
+          <a:extLst>
+            <a:ext uri="{909E8E84-426E-40DD-AFC4-6F175D3DCCD1}">
+              <a14:hiddenFill xmlns:a14="http://schemas.microsoft.com/office/drawing/2010/main">
+                <a:solidFill>
+                  <a:srgbClr val="FFFFFF"/>
+                </a:solidFill>
+              </a14:hiddenFill>
+            </a:ext>
+          </a:extLst>
+        </p:spPr>
+      </p:pic>
+      <p:pic>
+        <p:nvPicPr>
+          <p:cNvPr id="1028" name="Picture 4" descr="What is A/B Testing and How can Dropshipping Sellers Use it? - Topdser">
+            <a:extLst>
+              <a:ext uri="{FF2B5EF4-FFF2-40B4-BE49-F238E27FC236}">
+                <a16:creationId xmlns:a16="http://schemas.microsoft.com/office/drawing/2014/main" id="{139F44DC-CBF2-2C4A-8DAB-FCE649CC92C3}"/>
+              </a:ext>
+            </a:extLst>
+          </p:cNvPr>
+          <p:cNvPicPr>
+            <a:picLocks noChangeAspect="1" noChangeArrowheads="1"/>
+          </p:cNvPicPr>
+          <p:nvPr/>
+        </p:nvPicPr>
+        <p:blipFill>
+          <a:blip r:embed="rId6" cstate="email">
+            <a:extLst>
+              <a:ext uri="{28A0092B-C50C-407E-A947-70E740481C1C}">
+                <a14:useLocalDpi xmlns:a14="http://schemas.microsoft.com/office/drawing/2010/main"/>
+              </a:ext>
+            </a:extLst>
+          </a:blip>
+          <a:srcRect/>
+          <a:stretch>
+            <a:fillRect/>
+          </a:stretch>
+        </p:blipFill>
+        <p:spPr bwMode="auto">
+          <a:xfrm>
+            <a:off x="7315032" y="4958566"/>
+            <a:ext cx="3873501" cy="1731243"/>
+          </a:xfrm>
+          <a:prstGeom prst="rect">
+            <a:avLst/>
+          </a:prstGeom>
+          <a:noFill/>
+          <a:extLst>
+            <a:ext uri="{909E8E84-426E-40DD-AFC4-6F175D3DCCD1}">
+              <a14:hiddenFill xmlns:a14="http://schemas.microsoft.com/office/drawing/2010/main">
+                <a:solidFill>
+                  <a:srgbClr val="FFFFFF"/>
+                </a:solidFill>
+              </a14:hiddenFill>
+            </a:ext>
+          </a:extLst>
+        </p:spPr>
+      </p:pic>
+      <p:pic>
+        <p:nvPicPr>
+          <p:cNvPr id="1030" name="Picture 6" descr="Copy Chat: A Lesson From Legend Claude C. Hopkins">
+            <a:extLst>
+              <a:ext uri="{FF2B5EF4-FFF2-40B4-BE49-F238E27FC236}">
+                <a16:creationId xmlns:a16="http://schemas.microsoft.com/office/drawing/2014/main" id="{74AC9BEB-B02A-A346-BFF4-6D81BC189BD2}"/>
+              </a:ext>
+            </a:extLst>
+          </p:cNvPr>
+          <p:cNvPicPr>
+            <a:picLocks noChangeAspect="1" noChangeArrowheads="1"/>
+          </p:cNvPicPr>
+          <p:nvPr/>
+        </p:nvPicPr>
+        <p:blipFill>
+          <a:blip r:embed="rId7" cstate="email">
+            <a:extLst>
+              <a:ext uri="{28A0092B-C50C-407E-A947-70E740481C1C}">
+                <a14:useLocalDpi xmlns:a14="http://schemas.microsoft.com/office/drawing/2010/main"/>
+              </a:ext>
+            </a:extLst>
+          </a:blip>
+          <a:srcRect/>
+          <a:stretch>
+            <a:fillRect/>
+          </a:stretch>
+        </p:blipFill>
+        <p:spPr bwMode="auto">
+          <a:xfrm>
+            <a:off x="6096000" y="76402"/>
+            <a:ext cx="1649470" cy="2095500"/>
+          </a:xfrm>
+          <a:prstGeom prst="rect">
+            <a:avLst/>
+          </a:prstGeom>
+          <a:noFill/>
+          <a:extLst>
+            <a:ext uri="{909E8E84-426E-40DD-AFC4-6F175D3DCCD1}">
+              <a14:hiddenFill xmlns:a14="http://schemas.microsoft.com/office/drawing/2010/main">
+                <a:solidFill>
+                  <a:srgbClr val="FFFFFF"/>
+                </a:solidFill>
+              </a14:hiddenFill>
+            </a:ext>
+          </a:extLst>
+        </p:spPr>
+      </p:pic>
+      <p:sp>
+        <p:nvSpPr>
+          <p:cNvPr id="2" name="TextBox 1">
+            <a:extLst>
+              <a:ext uri="{FF2B5EF4-FFF2-40B4-BE49-F238E27FC236}">
+                <a16:creationId xmlns:a16="http://schemas.microsoft.com/office/drawing/2014/main" id="{448FFD93-E1A1-F146-B4D8-70CD8D47A287}"/>
               </a:ext>
             </a:extLst>
           </p:cNvPr>
@@ -3888,8 +4066,8 @@
         </p:nvSpPr>
         <p:spPr>
           <a:xfrm>
-            <a:off x="6796334" y="291624"/>
-            <a:ext cx="5369256" cy="5509200"/>
+            <a:off x="6036629" y="2148152"/>
+            <a:ext cx="1768216" cy="738664"/>
           </a:xfrm>
           <a:prstGeom prst="rect">
             <a:avLst/>
@@ -3902,128 +4080,311 @@
           </a:bodyPr>
           <a:lstStyle/>
           <a:p>
+            <a:pPr algn="ctr"/>
             <a:r>
               <a:rPr lang="en-US" sz="1400" dirty="0"/>
-              <a:t>Suppose we have two samples A and B, </a:t>
-            </a:r>
-          </a:p>
-          <a:p>
+              <a:t>Claude C. Hopkins</a:t>
+            </a:r>
+          </a:p>
+          <a:p>
+            <a:pPr algn="ctr"/>
             <a:r>
               <a:rPr lang="en-US" sz="1400" dirty="0"/>
-              <a:t>each has "n" points, where n is relatively large (100+ points), </a:t>
-            </a:r>
-          </a:p>
-          <a:p>
+              <a:t>(1866–1932)</a:t>
+            </a:r>
+          </a:p>
+          <a:p>
+            <a:pPr algn="ctr"/>
             <a:r>
               <a:rPr lang="en-US" sz="1400" dirty="0"/>
-              <a:t>and distributions on both sides have "normal" shape </a:t>
-            </a:r>
-          </a:p>
-          <a:p>
+              <a:t>Scientific Advertising</a:t>
+            </a:r>
+          </a:p>
+        </p:txBody>
+      </p:sp>
+      <p:pic>
+        <p:nvPicPr>
+          <p:cNvPr id="1034" name="Picture 10" descr="Scientific Advertising by Claude C. Hopkins">
+            <a:extLst>
+              <a:ext uri="{FF2B5EF4-FFF2-40B4-BE49-F238E27FC236}">
+                <a16:creationId xmlns:a16="http://schemas.microsoft.com/office/drawing/2014/main" id="{AA7053A3-250C-6541-B6EC-AC9E28DBD5C7}"/>
+              </a:ext>
+            </a:extLst>
+          </p:cNvPr>
+          <p:cNvPicPr>
+            <a:picLocks noChangeAspect="1" noChangeArrowheads="1"/>
+          </p:cNvPicPr>
+          <p:nvPr/>
+        </p:nvPicPr>
+        <p:blipFill>
+          <a:blip r:embed="rId8" cstate="email">
+            <a:extLst>
+              <a:ext uri="{28A0092B-C50C-407E-A947-70E740481C1C}">
+                <a14:useLocalDpi xmlns:a14="http://schemas.microsoft.com/office/drawing/2010/main"/>
+              </a:ext>
+            </a:extLst>
+          </a:blip>
+          <a:srcRect/>
+          <a:stretch>
+            <a:fillRect/>
+          </a:stretch>
+        </p:blipFill>
+        <p:spPr bwMode="auto">
+          <a:xfrm>
+            <a:off x="8015772" y="76402"/>
+            <a:ext cx="1382893" cy="2071750"/>
+          </a:xfrm>
+          <a:prstGeom prst="rect">
+            <a:avLst/>
+          </a:prstGeom>
+          <a:noFill/>
+          <a:extLst>
+            <a:ext uri="{909E8E84-426E-40DD-AFC4-6F175D3DCCD1}">
+              <a14:hiddenFill xmlns:a14="http://schemas.microsoft.com/office/drawing/2010/main">
+                <a:solidFill>
+                  <a:srgbClr val="FFFFFF"/>
+                </a:solidFill>
+              </a14:hiddenFill>
+            </a:ext>
+          </a:extLst>
+        </p:spPr>
+      </p:pic>
+      <p:pic>
+        <p:nvPicPr>
+          <p:cNvPr id="1036" name="Picture 12" descr="How a student of Guinness became 'the Faraday of statistics'">
+            <a:extLst>
+              <a:ext uri="{FF2B5EF4-FFF2-40B4-BE49-F238E27FC236}">
+                <a16:creationId xmlns:a16="http://schemas.microsoft.com/office/drawing/2014/main" id="{7250BE29-CAD5-894B-AD5A-DA63B88541FF}"/>
+              </a:ext>
+            </a:extLst>
+          </p:cNvPr>
+          <p:cNvPicPr>
+            <a:picLocks noChangeAspect="1" noChangeArrowheads="1"/>
+          </p:cNvPicPr>
+          <p:nvPr/>
+        </p:nvPicPr>
+        <p:blipFill>
+          <a:blip r:embed="rId9" cstate="email">
+            <a:extLst>
+              <a:ext uri="{28A0092B-C50C-407E-A947-70E740481C1C}">
+                <a14:useLocalDpi xmlns:a14="http://schemas.microsoft.com/office/drawing/2010/main"/>
+              </a:ext>
+            </a:extLst>
+          </a:blip>
+          <a:srcRect/>
+          <a:stretch>
+            <a:fillRect/>
+          </a:stretch>
+        </p:blipFill>
+        <p:spPr bwMode="auto">
+          <a:xfrm>
+            <a:off x="10148454" y="76402"/>
+            <a:ext cx="1675163" cy="1675163"/>
+          </a:xfrm>
+          <a:prstGeom prst="rect">
+            <a:avLst/>
+          </a:prstGeom>
+          <a:noFill/>
+          <a:extLst>
+            <a:ext uri="{909E8E84-426E-40DD-AFC4-6F175D3DCCD1}">
+              <a14:hiddenFill xmlns:a14="http://schemas.microsoft.com/office/drawing/2010/main">
+                <a:solidFill>
+                  <a:srgbClr val="FFFFFF"/>
+                </a:solidFill>
+              </a14:hiddenFill>
+            </a:ext>
+          </a:extLst>
+        </p:spPr>
+      </p:pic>
+      <p:sp>
+        <p:nvSpPr>
+          <p:cNvPr id="28" name="TextBox 27">
+            <a:extLst>
+              <a:ext uri="{FF2B5EF4-FFF2-40B4-BE49-F238E27FC236}">
+                <a16:creationId xmlns:a16="http://schemas.microsoft.com/office/drawing/2014/main" id="{03EE9665-EE03-4B41-B8C4-F86F1981240F}"/>
+              </a:ext>
+            </a:extLst>
+          </p:cNvPr>
+          <p:cNvSpPr txBox="1"/>
+          <p:nvPr/>
+        </p:nvSpPr>
+        <p:spPr>
+          <a:xfrm>
+            <a:off x="10101927" y="1802570"/>
+            <a:ext cx="1768216" cy="1169551"/>
+          </a:xfrm>
+          <a:prstGeom prst="rect">
+            <a:avLst/>
+          </a:prstGeom>
+          <a:noFill/>
+        </p:spPr>
+        <p:txBody>
+          <a:bodyPr wrap="square" rtlCol="0">
+            <a:spAutoFit/>
+          </a:bodyPr>
+          <a:lstStyle/>
+          <a:p>
+            <a:pPr algn="ctr"/>
             <a:r>
               <a:rPr lang="en-US" sz="1400" dirty="0"/>
-              <a:t>with same sample standard deviation "</a:t>
-            </a:r>
-            <a:r>
-              <a:rPr lang="en-US" sz="1400" b="1" dirty="0">
-                <a:solidFill>
-                  <a:srgbClr val="FF0000"/>
-                </a:solidFill>
-              </a:rPr>
-              <a:t>s</a:t>
+              <a:t>William Sealy </a:t>
+            </a:r>
+            <a:r>
+              <a:rPr lang="en-US" sz="1400" dirty="0" err="1"/>
+              <a:t>Gosset</a:t>
             </a:r>
             <a:r>
               <a:rPr lang="en-US" sz="1400" dirty="0"/>
-              <a:t>".</a:t>
-            </a:r>
-          </a:p>
-          <a:p>
-            <a:endParaRPr lang="en-US" sz="1400" dirty="0"/>
-          </a:p>
-          <a:p>
+              <a:t> (aka Student)</a:t>
+            </a:r>
+          </a:p>
+          <a:p>
+            <a:pPr algn="ctr"/>
             <a:r>
               <a:rPr lang="en-US" sz="1400" dirty="0"/>
-              <a:t>The mean values are </a:t>
-            </a:r>
-            <a:r>
-              <a:rPr lang="en-US" sz="1400" b="1" dirty="0">
-                <a:solidFill>
-                  <a:srgbClr val="FF0000"/>
-                </a:solidFill>
-              </a:rPr>
-              <a:t>m</a:t>
-            </a:r>
-            <a:r>
-              <a:rPr lang="en-US" sz="1400" b="1" baseline="-25000" dirty="0">
-                <a:solidFill>
-                  <a:srgbClr val="FF0000"/>
-                </a:solidFill>
-              </a:rPr>
-              <a:t>A</a:t>
-            </a:r>
+              <a:t>(1876-1937)</a:t>
+            </a:r>
+          </a:p>
+          <a:p>
+            <a:pPr algn="ctr"/>
             <a:r>
               <a:rPr lang="en-US" sz="1400" dirty="0"/>
-              <a:t> and </a:t>
-            </a:r>
-            <a:r>
-              <a:rPr lang="en-US" sz="1400" b="1" dirty="0" err="1">
-                <a:solidFill>
-                  <a:srgbClr val="FF0000"/>
-                </a:solidFill>
-              </a:rPr>
-              <a:t>m</a:t>
-            </a:r>
-            <a:r>
-              <a:rPr lang="en-US" sz="1400" b="1" baseline="-25000" dirty="0" err="1">
-                <a:solidFill>
-                  <a:srgbClr val="FF0000"/>
-                </a:solidFill>
-              </a:rPr>
-              <a:t>B</a:t>
-            </a:r>
-            <a:endParaRPr lang="en-US" sz="1400" b="1" baseline="-25000" dirty="0">
-              <a:solidFill>
-                <a:srgbClr val="FF0000"/>
-              </a:solidFill>
-            </a:endParaRPr>
-          </a:p>
-          <a:p>
-            <a:endParaRPr lang="en-US" sz="1400" dirty="0"/>
-          </a:p>
-          <a:p>
+              <a:t>t-test</a:t>
+            </a:r>
+          </a:p>
+          <a:p>
+            <a:pPr algn="ctr"/>
             <a:r>
               <a:rPr lang="en-US" sz="1400" dirty="0"/>
-              <a:t>The standard error of the mean</a:t>
-            </a:r>
-          </a:p>
-          <a:p>
-            <a:endParaRPr lang="en-US" sz="1400" dirty="0"/>
-          </a:p>
-          <a:p>
-            <a:r>
-              <a:rPr lang="en-US" sz="1400" dirty="0"/>
-              <a:t>                </a:t>
-            </a:r>
-            <a:r>
-              <a:rPr lang="en-US" sz="2000" b="1" dirty="0" err="1">
-                <a:solidFill>
-                  <a:srgbClr val="FF0000"/>
-                </a:solidFill>
-              </a:rPr>
-              <a:t>sem</a:t>
-            </a:r>
-            <a:r>
-              <a:rPr lang="en-US" sz="2000" b="1" dirty="0">
-                <a:solidFill>
-                  <a:srgbClr val="FF0000"/>
-                </a:solidFill>
-              </a:rPr>
-              <a:t> = s/sqrt(n)</a:t>
-            </a:r>
-          </a:p>
-          <a:p>
-            <a:endParaRPr lang="en-US" sz="1400" dirty="0"/>
-          </a:p>
+              <a:t>(1907-1908)</a:t>
+            </a:r>
+          </a:p>
+        </p:txBody>
+      </p:sp>
+    </p:spTree>
+    <p:extLst>
+      <p:ext uri="{BB962C8B-B14F-4D97-AF65-F5344CB8AC3E}">
+        <p14:creationId xmlns:p14="http://schemas.microsoft.com/office/powerpoint/2010/main" val="410025639"/>
+      </p:ext>
+    </p:extLst>
+  </p:cSld>
+  <p:clrMapOvr>
+    <a:masterClrMapping/>
+  </p:clrMapOvr>
+</p:sld>
+</file>
+
+<file path=ppt/slides/slide2.xml><?xml version="1.0" encoding="utf-8"?>
+<p:sld xmlns:a="http://schemas.openxmlformats.org/drawingml/2006/main" xmlns:r="http://schemas.openxmlformats.org/officeDocument/2006/relationships" xmlns:p="http://schemas.openxmlformats.org/presentationml/2006/main">
+  <p:cSld>
+    <p:spTree>
+      <p:nvGrpSpPr>
+        <p:cNvPr id="1" name=""/>
+        <p:cNvGrpSpPr/>
+        <p:nvPr/>
+      </p:nvGrpSpPr>
+      <p:grpSpPr>
+        <a:xfrm>
+          <a:off x="0" y="0"/>
+          <a:ext cx="0" cy="0"/>
+          <a:chOff x="0" y="0"/>
+          <a:chExt cx="0" cy="0"/>
+        </a:xfrm>
+      </p:grpSpPr>
+      <p:sp>
+        <p:nvSpPr>
+          <p:cNvPr id="4" name="TextBox 3">
+            <a:extLst>
+              <a:ext uri="{FF2B5EF4-FFF2-40B4-BE49-F238E27FC236}">
+                <a16:creationId xmlns:a16="http://schemas.microsoft.com/office/drawing/2014/main" id="{D1E58F78-8F27-2D4A-BD36-154CD23B3E50}"/>
+              </a:ext>
+            </a:extLst>
+          </p:cNvPr>
+          <p:cNvSpPr txBox="1"/>
+          <p:nvPr/>
+        </p:nvSpPr>
+        <p:spPr>
+          <a:xfrm>
+            <a:off x="0" y="76402"/>
+            <a:ext cx="4669862" cy="523220"/>
+          </a:xfrm>
+          <a:prstGeom prst="rect">
+            <a:avLst/>
+          </a:prstGeom>
+          <a:noFill/>
+        </p:spPr>
+        <p:txBody>
+          <a:bodyPr wrap="square" rtlCol="0">
+            <a:spAutoFit/>
+          </a:bodyPr>
+          <a:lstStyle/>
+          <a:p>
+            <a:r>
+              <a:rPr lang="en-US" sz="2800" b="1" dirty="0"/>
+              <a:t>How many points you need?</a:t>
+            </a:r>
+          </a:p>
+        </p:txBody>
+      </p:sp>
+      <p:sp>
+        <p:nvSpPr>
+          <p:cNvPr id="5" name="TextBox 4">
+            <a:extLst>
+              <a:ext uri="{FF2B5EF4-FFF2-40B4-BE49-F238E27FC236}">
+                <a16:creationId xmlns:a16="http://schemas.microsoft.com/office/drawing/2014/main" id="{9ECF6344-25D1-214F-A75E-373DADD0E10F}"/>
+              </a:ext>
+            </a:extLst>
+          </p:cNvPr>
+          <p:cNvSpPr txBox="1"/>
+          <p:nvPr/>
+        </p:nvSpPr>
+        <p:spPr>
+          <a:xfrm>
+            <a:off x="13846629" y="6673929"/>
+            <a:ext cx="184731" cy="369332"/>
+          </a:xfrm>
+          <a:prstGeom prst="rect">
+            <a:avLst/>
+          </a:prstGeom>
+          <a:noFill/>
+        </p:spPr>
+        <p:txBody>
+          <a:bodyPr wrap="none" rtlCol="0">
+            <a:spAutoFit/>
+          </a:bodyPr>
+          <a:lstStyle/>
+          <a:p>
+            <a:endParaRPr lang="en-US" dirty="0"/>
+          </a:p>
+        </p:txBody>
+      </p:sp>
+      <p:sp>
+        <p:nvSpPr>
+          <p:cNvPr id="10" name="TextBox 9">
+            <a:extLst>
+              <a:ext uri="{FF2B5EF4-FFF2-40B4-BE49-F238E27FC236}">
+                <a16:creationId xmlns:a16="http://schemas.microsoft.com/office/drawing/2014/main" id="{F715B8E9-39AB-D945-BE08-302996794FCE}"/>
+              </a:ext>
+            </a:extLst>
+          </p:cNvPr>
+          <p:cNvSpPr txBox="1"/>
+          <p:nvPr/>
+        </p:nvSpPr>
+        <p:spPr>
+          <a:xfrm>
+            <a:off x="6796334" y="291624"/>
+            <a:ext cx="5369256" cy="2985433"/>
+          </a:xfrm>
+          <a:prstGeom prst="rect">
+            <a:avLst/>
+          </a:prstGeom>
+          <a:noFill/>
+        </p:spPr>
+        <p:txBody>
+          <a:bodyPr wrap="square" rtlCol="0">
+            <a:spAutoFit/>
+          </a:bodyPr>
+          <a:lstStyle/>
           <a:p>
             <a:r>
               <a:rPr lang="en-US" b="1" dirty="0">
@@ -4060,7 +4421,7 @@
                 <a:solidFill>
                   <a:srgbClr val="00B050"/>
                 </a:solidFill>
-                <a:hlinkClick r:id="rId4"/>
+                <a:hlinkClick r:id="rId2"/>
               </a:rPr>
               <a:t>https://www.youtube.com/watch?v=JEAsoUrX6KQ</a:t>
             </a:r>
@@ -6343,7 +6704,7 @@
           <p:nvPr/>
         </p:nvPicPr>
         <p:blipFill rotWithShape="1">
-          <a:blip r:embed="rId5" cstate="email">
+          <a:blip r:embed="rId3" cstate="email">
             <a:extLst>
               <a:ext uri="{28A0092B-C50C-407E-A947-70E740481C1C}">
                 <a14:useLocalDpi xmlns:a14="http://schemas.microsoft.com/office/drawing/2010/main"/>
@@ -6355,7 +6716,7 @@
         </p:blipFill>
         <p:spPr bwMode="auto">
           <a:xfrm>
-            <a:off x="10630389" y="5565609"/>
+            <a:off x="9264730" y="4140570"/>
             <a:ext cx="1450536" cy="1183611"/>
           </a:xfrm>
           <a:prstGeom prst="rect">
@@ -6387,7 +6748,7 @@
         </p:nvSpPr>
         <p:spPr>
           <a:xfrm>
-            <a:off x="9902255" y="5926480"/>
+            <a:off x="8536596" y="4501441"/>
             <a:ext cx="728134" cy="584775"/>
           </a:xfrm>
           <a:prstGeom prst="rect">
@@ -6423,7 +6784,7 @@
           <p:nvPr/>
         </p:nvPicPr>
         <p:blipFill>
-          <a:blip r:embed="rId6" cstate="email">
+          <a:blip r:embed="rId4" cstate="email">
             <a:extLst>
               <a:ext uri="{28A0092B-C50C-407E-A947-70E740481C1C}">
                 <a14:useLocalDpi xmlns:a14="http://schemas.microsoft.com/office/drawing/2010/main"/>
@@ -6436,7 +6797,7 @@
         </p:blipFill>
         <p:spPr>
           <a:xfrm>
-            <a:off x="4956016" y="3560454"/>
+            <a:off x="5692284" y="4189844"/>
             <a:ext cx="1809750" cy="1200150"/>
           </a:xfrm>
           <a:prstGeom prst="rect">
@@ -6458,7 +6819,7 @@
         </p:nvSpPr>
         <p:spPr>
           <a:xfrm rot="16200000">
-            <a:off x="5785535" y="4515214"/>
+            <a:off x="6521803" y="5144604"/>
             <a:ext cx="174462" cy="758418"/>
           </a:xfrm>
           <a:prstGeom prst="leftBrace">
@@ -6503,7 +6864,7 @@
         </p:nvSpPr>
         <p:spPr>
           <a:xfrm>
-            <a:off x="5580642" y="4920347"/>
+            <a:off x="6316910" y="5549737"/>
             <a:ext cx="585770" cy="369332"/>
           </a:xfrm>
           <a:prstGeom prst="rect">
@@ -6538,10 +6899,167 @@
           </a:p>
         </p:txBody>
       </p:sp>
+      <p:sp>
+        <p:nvSpPr>
+          <p:cNvPr id="23" name="TextBox 22">
+            <a:extLst>
+              <a:ext uri="{FF2B5EF4-FFF2-40B4-BE49-F238E27FC236}">
+                <a16:creationId xmlns:a16="http://schemas.microsoft.com/office/drawing/2014/main" id="{57D5790E-8D2A-1F4D-A13D-0C5CC7ADE36A}"/>
+              </a:ext>
+            </a:extLst>
+          </p:cNvPr>
+          <p:cNvSpPr txBox="1"/>
+          <p:nvPr/>
+        </p:nvSpPr>
+        <p:spPr>
+          <a:xfrm>
+            <a:off x="211386" y="709667"/>
+            <a:ext cx="5369256" cy="2339102"/>
+          </a:xfrm>
+          <a:prstGeom prst="rect">
+            <a:avLst/>
+          </a:prstGeom>
+          <a:noFill/>
+        </p:spPr>
+        <p:txBody>
+          <a:bodyPr wrap="square" rtlCol="0">
+            <a:spAutoFit/>
+          </a:bodyPr>
+          <a:lstStyle/>
+          <a:p>
+            <a:r>
+              <a:rPr lang="en-US" sz="1400" dirty="0"/>
+              <a:t>Suppose we have two samples A and B, </a:t>
+            </a:r>
+          </a:p>
+          <a:p>
+            <a:r>
+              <a:rPr lang="en-US" sz="1400" dirty="0"/>
+              <a:t>each has "n" points, where n is relatively large (100+ points), </a:t>
+            </a:r>
+          </a:p>
+          <a:p>
+            <a:r>
+              <a:rPr lang="en-US" sz="1400" dirty="0"/>
+              <a:t>and distributions on both sides have "normal" shape </a:t>
+            </a:r>
+          </a:p>
+          <a:p>
+            <a:r>
+              <a:rPr lang="en-US" sz="1400" dirty="0"/>
+              <a:t>with same sample standard deviation "</a:t>
+            </a:r>
+            <a:r>
+              <a:rPr lang="en-US" sz="1400" b="1" dirty="0">
+                <a:solidFill>
+                  <a:srgbClr val="FF0000"/>
+                </a:solidFill>
+              </a:rPr>
+              <a:t>s</a:t>
+            </a:r>
+            <a:r>
+              <a:rPr lang="en-US" sz="1400" dirty="0"/>
+              <a:t>".</a:t>
+            </a:r>
+          </a:p>
+          <a:p>
+            <a:endParaRPr lang="en-US" sz="1400" dirty="0"/>
+          </a:p>
+          <a:p>
+            <a:r>
+              <a:rPr lang="en-US" sz="1400" dirty="0"/>
+              <a:t>The mean values are </a:t>
+            </a:r>
+            <a:r>
+              <a:rPr lang="en-US" sz="1400" b="1" dirty="0">
+                <a:solidFill>
+                  <a:srgbClr val="FF0000"/>
+                </a:solidFill>
+              </a:rPr>
+              <a:t>m</a:t>
+            </a:r>
+            <a:r>
+              <a:rPr lang="en-US" sz="1400" b="1" baseline="-25000" dirty="0">
+                <a:solidFill>
+                  <a:srgbClr val="FF0000"/>
+                </a:solidFill>
+              </a:rPr>
+              <a:t>A</a:t>
+            </a:r>
+            <a:r>
+              <a:rPr lang="en-US" sz="1400" dirty="0"/>
+              <a:t> and </a:t>
+            </a:r>
+            <a:r>
+              <a:rPr lang="en-US" sz="1400" b="1" dirty="0" err="1">
+                <a:solidFill>
+                  <a:srgbClr val="FF0000"/>
+                </a:solidFill>
+              </a:rPr>
+              <a:t>m</a:t>
+            </a:r>
+            <a:r>
+              <a:rPr lang="en-US" sz="1400" b="1" baseline="-25000" dirty="0" err="1">
+                <a:solidFill>
+                  <a:srgbClr val="FF0000"/>
+                </a:solidFill>
+              </a:rPr>
+              <a:t>B</a:t>
+            </a:r>
+            <a:endParaRPr lang="en-US" sz="1400" b="1" baseline="-25000" dirty="0">
+              <a:solidFill>
+                <a:srgbClr val="FF0000"/>
+              </a:solidFill>
+            </a:endParaRPr>
+          </a:p>
+          <a:p>
+            <a:endParaRPr lang="en-US" sz="1400" dirty="0"/>
+          </a:p>
+          <a:p>
+            <a:r>
+              <a:rPr lang="en-US" sz="1400" dirty="0"/>
+              <a:t>The standard error of the mean (</a:t>
+            </a:r>
+            <a:r>
+              <a:rPr lang="en-US" sz="1400" dirty="0" err="1"/>
+              <a:t>sem</a:t>
+            </a:r>
+            <a:r>
+              <a:rPr lang="en-US" sz="1400" dirty="0"/>
+              <a:t>):</a:t>
+            </a:r>
+          </a:p>
+          <a:p>
+            <a:endParaRPr lang="en-US" sz="1400" dirty="0"/>
+          </a:p>
+          <a:p>
+            <a:r>
+              <a:rPr lang="en-US" sz="1400" dirty="0"/>
+              <a:t>                </a:t>
+            </a:r>
+            <a:r>
+              <a:rPr lang="en-US" sz="2000" b="1" dirty="0" err="1">
+                <a:solidFill>
+                  <a:srgbClr val="FF0000"/>
+                </a:solidFill>
+              </a:rPr>
+              <a:t>sem</a:t>
+            </a:r>
+            <a:r>
+              <a:rPr lang="en-US" sz="2000" b="1" dirty="0">
+                <a:solidFill>
+                  <a:srgbClr val="FF0000"/>
+                </a:solidFill>
+              </a:rPr>
+              <a:t> = s/sqrt(n)</a:t>
+            </a:r>
+          </a:p>
+        </p:txBody>
+      </p:sp>
     </p:spTree>
     <p:extLst>
       <p:ext uri="{BB962C8B-B14F-4D97-AF65-F5344CB8AC3E}">
-        <p14:creationId xmlns:p14="http://schemas.microsoft.com/office/powerpoint/2010/main" val="410025639"/>
+        <p14:creationId xmlns:p14="http://schemas.microsoft.com/office/powerpoint/2010/main" val="3713684677"/>
       </p:ext>
     </p:extLst>
   </p:cSld>
@@ -6551,7 +7069,7 @@
 </p:sld>
 </file>
 
-<file path=ppt/slides/slide2.xml><?xml version="1.0" encoding="utf-8"?>
+<file path=ppt/slides/slide3.xml><?xml version="1.0" encoding="utf-8"?>
 <p:sld xmlns:a="http://schemas.openxmlformats.org/drawingml/2006/main" xmlns:r="http://schemas.openxmlformats.org/officeDocument/2006/relationships" xmlns:p="http://schemas.openxmlformats.org/presentationml/2006/main">
   <p:cSld>
     <p:spTree>
@@ -6615,42 +7133,42 @@
           <p:nvPr>
             <p:extLst>
               <p:ext uri="{D42A27DB-BD31-4B8C-83A1-F6EECF244321}">
-                <p14:modId xmlns:p14="http://schemas.microsoft.com/office/powerpoint/2010/main" val="2969938879"/>
+                <p14:modId xmlns:p14="http://schemas.microsoft.com/office/powerpoint/2010/main" val="2110162394"/>
               </p:ext>
             </p:extLst>
           </p:nvPr>
         </p:nvGraphicFramePr>
         <p:xfrm>
-          <a:off x="1294410" y="1218042"/>
-          <a:ext cx="9303000" cy="2436198"/>
+          <a:off x="1591294" y="1386840"/>
+          <a:ext cx="8768609" cy="2042160"/>
         </p:xfrm>
         <a:graphic>
           <a:graphicData uri="http://schemas.openxmlformats.org/drawingml/2006/table">
             <a:tbl>
               <a:tblPr/>
               <a:tblGrid>
-                <a:gridCol w="2325750">
+                <a:gridCol w="2192153">
                   <a:extLst>
                     <a:ext uri="{9D8B030D-6E8A-4147-A177-3AD203B41FA5}">
                       <a16:colId xmlns:a16="http://schemas.microsoft.com/office/drawing/2014/main" val="511701535"/>
                     </a:ext>
                   </a:extLst>
                 </a:gridCol>
-                <a:gridCol w="2637313">
+                <a:gridCol w="2485818">
                   <a:extLst>
                     <a:ext uri="{9D8B030D-6E8A-4147-A177-3AD203B41FA5}">
                       <a16:colId xmlns:a16="http://schemas.microsoft.com/office/drawing/2014/main" val="673333880"/>
                     </a:ext>
                   </a:extLst>
                 </a:gridCol>
-                <a:gridCol w="2801166">
+                <a:gridCol w="2640259">
                   <a:extLst>
                     <a:ext uri="{9D8B030D-6E8A-4147-A177-3AD203B41FA5}">
                       <a16:colId xmlns:a16="http://schemas.microsoft.com/office/drawing/2014/main" val="3311816561"/>
                     </a:ext>
                   </a:extLst>
                 </a:gridCol>
-                <a:gridCol w="1538771">
+                <a:gridCol w="1450379">
                   <a:extLst>
                     <a:ext uri="{9D8B030D-6E8A-4147-A177-3AD203B41FA5}">
                       <a16:colId xmlns:a16="http://schemas.microsoft.com/office/drawing/2014/main" val="2056402211"/>
@@ -6658,7 +7176,7 @@
                   </a:extLst>
                 </a:gridCol>
               </a:tblGrid>
-              <a:tr h="246411">
+              <a:tr h="243327">
                 <a:tc>
                   <a:txBody>
                     <a:bodyPr/>
@@ -6666,7 +7184,7 @@
                     <a:p>
                       <a:pPr algn="r" fontAlgn="ctr"/>
                       <a:r>
-                        <a:rPr lang="en-US" sz="1600" b="1">
+                        <a:rPr lang="en-US" sz="1400" b="1">
                           <a:effectLst/>
                         </a:rPr>
                         <a:t>Assumed Distribution</a:t>
@@ -6698,7 +7216,7 @@
                     <a:p>
                       <a:pPr algn="r" fontAlgn="ctr"/>
                       <a:r>
-                        <a:rPr lang="en-US" sz="1600" b="1">
+                        <a:rPr lang="en-US" sz="1400" b="1">
                           <a:effectLst/>
                         </a:rPr>
                         <a:t>Example Case</a:t>
@@ -6730,7 +7248,7 @@
                     <a:p>
                       <a:pPr algn="r" fontAlgn="ctr"/>
                       <a:r>
-                        <a:rPr lang="en-US" sz="1600" b="1">
+                        <a:rPr lang="en-US" sz="1400" b="1">
                           <a:effectLst/>
                         </a:rPr>
                         <a:t>Standard Test</a:t>
@@ -6762,7 +7280,7 @@
                     <a:p>
                       <a:pPr algn="r" fontAlgn="ctr"/>
                       <a:r>
-                        <a:rPr lang="en-US" sz="1600" b="1">
+                        <a:rPr lang="en-US" sz="1400" b="1">
                           <a:effectLst/>
                         </a:rPr>
                         <a:t>Alternative Test</a:t>
@@ -6793,7 +7311,7 @@
                   </a:ext>
                 </a:extLst>
               </a:tr>
-              <a:tr h="425619">
+              <a:tr h="297638">
                 <a:tc>
                   <a:txBody>
                     <a:bodyPr/>
@@ -6801,7 +7319,7 @@
                     <a:p>
                       <a:pPr algn="r" fontAlgn="ctr"/>
                       <a:r>
-                        <a:rPr lang="en-US" sz="1600">
+                        <a:rPr lang="en-US" sz="1400">
                           <a:effectLst/>
                         </a:rPr>
                         <a:t>Gaussian</a:t>
@@ -6833,7 +7351,7 @@
                     <a:p>
                       <a:pPr algn="r" fontAlgn="ctr"/>
                       <a:r>
-                        <a:rPr lang="en-US" sz="1600" dirty="0">
+                        <a:rPr lang="en-US" sz="1400" dirty="0">
                           <a:effectLst/>
                         </a:rPr>
                         <a:t>Average revenue per user</a:t>
@@ -6865,7 +7383,7 @@
                     <a:p>
                       <a:pPr algn="r" fontAlgn="ctr"/>
                       <a:r>
-                        <a:rPr lang="en-US" sz="1600" dirty="0">
+                        <a:rPr lang="en-US" sz="1400" dirty="0">
                           <a:effectLst/>
                         </a:rPr>
                         <a:t>Welch's t-test (Unpaired t-test)</a:t>
@@ -6897,7 +7415,7 @@
                     <a:p>
                       <a:pPr algn="r" fontAlgn="ctr"/>
                       <a:r>
-                        <a:rPr lang="en-US" sz="1600" dirty="0">
+                        <a:rPr lang="en-US" sz="1400" dirty="0">
                           <a:effectLst/>
                         </a:rPr>
                         <a:t>Student's t-test</a:t>
@@ -6928,7 +7446,7 @@
                   </a:ext>
                 </a:extLst>
               </a:tr>
-              <a:tr h="246411">
+              <a:tr h="243327">
                 <a:tc>
                   <a:txBody>
                     <a:bodyPr/>
@@ -6936,7 +7454,7 @@
                     <a:p>
                       <a:pPr algn="r" fontAlgn="ctr"/>
                       <a:r>
-                        <a:rPr lang="en-US" sz="1600">
+                        <a:rPr lang="en-US" sz="1400">
                           <a:effectLst/>
                         </a:rPr>
                         <a:t>Binomial</a:t>
@@ -6968,7 +7486,7 @@
                     <a:p>
                       <a:pPr algn="r" fontAlgn="ctr"/>
                       <a:r>
-                        <a:rPr lang="en-US" sz="1600" dirty="0">
+                        <a:rPr lang="en-US" sz="1400" dirty="0">
                           <a:effectLst/>
                         </a:rPr>
                         <a:t>Click-through rate</a:t>
@@ -7000,7 +7518,7 @@
                     <a:p>
                       <a:pPr algn="r" fontAlgn="ctr"/>
                       <a:r>
-                        <a:rPr lang="en-US" sz="1600" dirty="0">
+                        <a:rPr lang="en-US" sz="1400" dirty="0">
                           <a:effectLst/>
                         </a:rPr>
                         <a:t>Fisher's exact test</a:t>
@@ -7032,7 +7550,7 @@
                     <a:p>
                       <a:pPr algn="r" fontAlgn="ctr"/>
                       <a:r>
-                        <a:rPr lang="en-US" sz="1600">
+                        <a:rPr lang="en-US" sz="1400">
                           <a:effectLst/>
                         </a:rPr>
                         <a:t>Barnard's test</a:t>
@@ -7063,7 +7581,7 @@
                   </a:ext>
                 </a:extLst>
               </a:tr>
-              <a:tr h="425619">
+              <a:tr h="297638">
                 <a:tc>
                   <a:txBody>
                     <a:bodyPr/>
@@ -7071,7 +7589,7 @@
                     <a:p>
                       <a:pPr algn="r" fontAlgn="ctr"/>
                       <a:r>
-                        <a:rPr lang="en-US" sz="1600">
+                        <a:rPr lang="en-US" sz="1400">
                           <a:effectLst/>
                         </a:rPr>
                         <a:t>Poisson</a:t>
@@ -7103,7 +7621,7 @@
                     <a:p>
                       <a:pPr algn="r" fontAlgn="ctr"/>
                       <a:r>
-                        <a:rPr lang="en-US" sz="1600" dirty="0">
+                        <a:rPr lang="en-US" sz="1400" dirty="0">
                           <a:effectLst/>
                         </a:rPr>
                         <a:t>Transactions per paying user</a:t>
@@ -7135,7 +7653,7 @@
                     <a:p>
                       <a:pPr algn="r" fontAlgn="ctr"/>
                       <a:r>
-                        <a:rPr lang="en-US" sz="1600" dirty="0">
+                        <a:rPr lang="en-US" sz="1400" dirty="0">
                           <a:effectLst/>
                         </a:rPr>
                         <a:t>E-test</a:t>
@@ -7167,7 +7685,7 @@
                     <a:p>
                       <a:pPr algn="r" fontAlgn="ctr"/>
                       <a:r>
-                        <a:rPr lang="en-US" sz="1600">
+                        <a:rPr lang="en-US" sz="1400">
                           <a:effectLst/>
                         </a:rPr>
                         <a:t>C-test</a:t>
@@ -7198,7 +7716,7 @@
                   </a:ext>
                 </a:extLst>
               </a:tr>
-              <a:tr h="425619">
+              <a:tr h="413656">
                 <a:tc>
                   <a:txBody>
                     <a:bodyPr/>
@@ -7206,7 +7724,7 @@
                     <a:p>
                       <a:pPr algn="r" fontAlgn="ctr"/>
                       <a:r>
-                        <a:rPr lang="en-US" sz="1600">
+                        <a:rPr lang="en-US" sz="1400">
                           <a:effectLst/>
                         </a:rPr>
                         <a:t>Multinomial</a:t>
@@ -7238,7 +7756,7 @@
                     <a:p>
                       <a:pPr algn="r" fontAlgn="ctr"/>
                       <a:r>
-                        <a:rPr lang="en-US" sz="1600">
+                        <a:rPr lang="en-US" sz="1400">
                           <a:effectLst/>
                         </a:rPr>
                         <a:t>Number of each product purchased</a:t>
@@ -7270,7 +7788,7 @@
                     <a:p>
                       <a:pPr algn="r" fontAlgn="ctr"/>
                       <a:r>
-                        <a:rPr lang="en-US" sz="1600">
+                        <a:rPr lang="en-US" sz="1400">
                           <a:effectLst/>
                         </a:rPr>
                         <a:t>Chi-squared test</a:t>
@@ -7301,7 +7819,7 @@
                     <a:lstStyle/>
                     <a:p>
                       <a:pPr algn="r" fontAlgn="ctr"/>
-                      <a:endParaRPr lang="en-US" sz="1600">
+                      <a:endParaRPr lang="en-US" sz="1400">
                         <a:effectLst/>
                       </a:endParaRPr>
                     </a:p>
@@ -7330,7 +7848,7 @@
                   </a:ext>
                 </a:extLst>
               </a:tr>
-              <a:tr h="246411">
+              <a:tr h="243327">
                 <a:tc>
                   <a:txBody>
                     <a:bodyPr/>
@@ -7338,7 +7856,7 @@
                     <a:p>
                       <a:pPr algn="r" fontAlgn="ctr"/>
                       <a:r>
-                        <a:rPr lang="en-US" sz="1600">
+                        <a:rPr lang="en-US" sz="1400">
                           <a:effectLst/>
                         </a:rPr>
                         <a:t>Unknown</a:t>
@@ -7369,7 +7887,7 @@
                     <a:lstStyle/>
                     <a:p>
                       <a:pPr algn="r" fontAlgn="ctr"/>
-                      <a:endParaRPr lang="en-US" sz="1600">
+                      <a:endParaRPr lang="en-US" sz="1400">
                         <a:effectLst/>
                       </a:endParaRPr>
                     </a:p>
@@ -7399,7 +7917,7 @@
                     <a:p>
                       <a:pPr algn="r" fontAlgn="ctr"/>
                       <a:r>
-                        <a:rPr lang="en-US" sz="1600">
+                        <a:rPr lang="en-US" sz="1400">
                           <a:effectLst/>
                         </a:rPr>
                         <a:t>Mann–Whitney U test</a:t>
@@ -7431,7 +7949,7 @@
                     <a:p>
                       <a:pPr algn="r" fontAlgn="ctr"/>
                       <a:r>
-                        <a:rPr lang="en-US" sz="1600" dirty="0">
+                        <a:rPr lang="en-US" sz="1400" dirty="0">
                           <a:effectLst/>
                         </a:rPr>
                         <a:t>Gibbs sampling</a:t>
@@ -7708,7 +8226,330 @@
 </p:sld>
 </file>
 
-<file path=ppt/slides/slide3.xml><?xml version="1.0" encoding="utf-8"?>
+<file path=ppt/slides/slide4.xml><?xml version="1.0" encoding="utf-8"?>
+<p:sld xmlns:a="http://schemas.openxmlformats.org/drawingml/2006/main" xmlns:r="http://schemas.openxmlformats.org/officeDocument/2006/relationships" xmlns:p="http://schemas.openxmlformats.org/presentationml/2006/main">
+  <p:cSld>
+    <p:spTree>
+      <p:nvGrpSpPr>
+        <p:cNvPr id="1" name=""/>
+        <p:cNvGrpSpPr/>
+        <p:nvPr/>
+      </p:nvGrpSpPr>
+      <p:grpSpPr>
+        <a:xfrm>
+          <a:off x="0" y="0"/>
+          <a:ext cx="0" cy="0"/>
+          <a:chOff x="0" y="0"/>
+          <a:chExt cx="0" cy="0"/>
+        </a:xfrm>
+      </p:grpSpPr>
+      <p:sp>
+        <p:nvSpPr>
+          <p:cNvPr id="2" name="TextBox 1">
+            <a:extLst>
+              <a:ext uri="{FF2B5EF4-FFF2-40B4-BE49-F238E27FC236}">
+                <a16:creationId xmlns:a16="http://schemas.microsoft.com/office/drawing/2014/main" id="{E3BE1FBD-C5C8-E14F-8F2D-9F5BCABFDD7C}"/>
+              </a:ext>
+            </a:extLst>
+          </p:cNvPr>
+          <p:cNvSpPr txBox="1"/>
+          <p:nvPr/>
+        </p:nvSpPr>
+        <p:spPr>
+          <a:xfrm>
+            <a:off x="605642" y="1459230"/>
+            <a:ext cx="7445828" cy="3939540"/>
+          </a:xfrm>
+          <a:prstGeom prst="rect">
+            <a:avLst/>
+          </a:prstGeom>
+          <a:noFill/>
+        </p:spPr>
+        <p:txBody>
+          <a:bodyPr wrap="square" rtlCol="0">
+            <a:spAutoFit/>
+          </a:bodyPr>
+          <a:lstStyle/>
+          <a:p>
+            <a:pPr marL="342900" indent="-342900">
+              <a:buFont typeface="+mj-lt"/>
+              <a:buAutoNum type="arabicPeriod"/>
+            </a:pPr>
+            <a:r>
+              <a:rPr lang="en-US" sz="1600" dirty="0"/>
+              <a:t>Ending the experiment prematurely (not getting enough data points)</a:t>
+            </a:r>
+          </a:p>
+          <a:p>
+            <a:pPr marL="342900" indent="-342900">
+              <a:buFont typeface="+mj-lt"/>
+              <a:buAutoNum type="arabicPeriod"/>
+            </a:pPr>
+            <a:r>
+              <a:rPr lang="en-US" sz="1600" dirty="0"/>
+              <a:t>Non-consistent (not truly random) cluster assignment</a:t>
+            </a:r>
+          </a:p>
+          <a:p>
+            <a:pPr marL="342900" indent="-342900">
+              <a:buFont typeface="+mj-lt"/>
+              <a:buAutoNum type="arabicPeriod"/>
+            </a:pPr>
+            <a:r>
+              <a:rPr lang="en-US" sz="1600" dirty="0"/>
+              <a:t>A random assignment fails to distribute heavy users equally. </a:t>
+            </a:r>
+            <a:br>
+              <a:rPr lang="en-US" sz="1600" dirty="0"/>
+            </a:br>
+            <a:r>
+              <a:rPr lang="en-US" sz="1600" dirty="0"/>
+              <a:t>A/A test to check consistency</a:t>
+            </a:r>
+          </a:p>
+          <a:p>
+            <a:pPr marL="342900" indent="-342900">
+              <a:buFont typeface="+mj-lt"/>
+              <a:buAutoNum type="arabicPeriod"/>
+            </a:pPr>
+            <a:r>
+              <a:rPr lang="en-US" sz="1600" dirty="0"/>
+              <a:t>Fail to check the Ceteris Paribus assumption ("all other things being equal" – Latin)</a:t>
+            </a:r>
+          </a:p>
+          <a:p>
+            <a:pPr marL="342900" indent="-342900">
+              <a:buFont typeface="+mj-lt"/>
+              <a:buAutoNum type="arabicPeriod"/>
+            </a:pPr>
+            <a:r>
+              <a:rPr lang="en-US" sz="1600" dirty="0"/>
+              <a:t>Cross-contamination between the treatment and control groups</a:t>
+            </a:r>
+          </a:p>
+          <a:p>
+            <a:pPr marL="342900" indent="-342900">
+              <a:buFont typeface="+mj-lt"/>
+              <a:buAutoNum type="arabicPeriod"/>
+            </a:pPr>
+            <a:r>
+              <a:rPr lang="en-US" sz="1600" dirty="0"/>
+              <a:t>Get fouled by False Positives while making multiple comparisons </a:t>
+            </a:r>
+            <a:br>
+              <a:rPr lang="en-US" sz="1600" dirty="0"/>
+            </a:br>
+            <a:r>
+              <a:rPr lang="en-US" sz="1600" dirty="0"/>
+              <a:t>(use the Bonferroni correction to correct)</a:t>
+            </a:r>
+          </a:p>
+          <a:p>
+            <a:pPr marL="342900" indent="-342900">
+              <a:buFont typeface="+mj-lt"/>
+              <a:buAutoNum type="arabicPeriod"/>
+            </a:pPr>
+            <a:r>
+              <a:rPr lang="en-US" sz="1600" dirty="0"/>
+              <a:t>Individual and aggregated patterns look different for ramp-up experiments</a:t>
+            </a:r>
+            <a:br>
+              <a:rPr lang="en-US" sz="1600" dirty="0"/>
+            </a:br>
+            <a:r>
+              <a:rPr lang="en-US" sz="1600" dirty="0"/>
+              <a:t>(</a:t>
+            </a:r>
+            <a:r>
+              <a:rPr lang="en-US" sz="1600" b="1" dirty="0">
+                <a:solidFill>
+                  <a:srgbClr val="FF0000"/>
+                </a:solidFill>
+              </a:rPr>
+              <a:t>Simpson's paradox</a:t>
+            </a:r>
+            <a:r>
+              <a:rPr lang="en-US" sz="1600" dirty="0"/>
+              <a:t>). Three solutions: (1) use paired t-tests (test before and after); (2) use the weighted sum to adjust for the different ratios; (3) throw away the data from the ramp-up period. </a:t>
+            </a:r>
+          </a:p>
+          <a:p>
+            <a:pPr marL="342900" indent="-342900">
+              <a:buFont typeface="+mj-lt"/>
+              <a:buAutoNum type="arabicPeriod"/>
+            </a:pPr>
+            <a:r>
+              <a:rPr lang="en-US" sz="1600" dirty="0"/>
+              <a:t>Fail to check the primacy and novelty effects</a:t>
+            </a:r>
+          </a:p>
+          <a:p>
+            <a:pPr marL="342900" indent="-342900">
+              <a:buFont typeface="+mj-lt"/>
+              <a:buAutoNum type="arabicPeriod"/>
+            </a:pPr>
+            <a:endParaRPr lang="en-US" dirty="0"/>
+          </a:p>
+          <a:p>
+            <a:pPr marL="342900" indent="-342900">
+              <a:buFont typeface="+mj-lt"/>
+              <a:buAutoNum type="arabicPeriod"/>
+            </a:pPr>
+            <a:endParaRPr lang="en-US" sz="1200" dirty="0"/>
+          </a:p>
+          <a:p>
+            <a:r>
+              <a:rPr lang="en-US" sz="1200" dirty="0">
+                <a:hlinkClick r:id="rId2"/>
+              </a:rPr>
+              <a:t>https://towardsdatascience.com/online-controlled-experiment-8-common-pitfalls-and-solutions-ea4488e5a82e</a:t>
+            </a:r>
+            <a:r>
+              <a:rPr lang="en-US" sz="1200" dirty="0"/>
+              <a:t> </a:t>
+            </a:r>
+          </a:p>
+        </p:txBody>
+      </p:sp>
+      <p:sp>
+        <p:nvSpPr>
+          <p:cNvPr id="3" name="TextBox 2">
+            <a:extLst>
+              <a:ext uri="{FF2B5EF4-FFF2-40B4-BE49-F238E27FC236}">
+                <a16:creationId xmlns:a16="http://schemas.microsoft.com/office/drawing/2014/main" id="{9D2F077A-2E03-EB49-8EF9-9D436252504D}"/>
+              </a:ext>
+            </a:extLst>
+          </p:cNvPr>
+          <p:cNvSpPr txBox="1"/>
+          <p:nvPr/>
+        </p:nvSpPr>
+        <p:spPr>
+          <a:xfrm>
+            <a:off x="0" y="119559"/>
+            <a:ext cx="5985164" cy="523220"/>
+          </a:xfrm>
+          <a:prstGeom prst="rect">
+            <a:avLst/>
+          </a:prstGeom>
+          <a:noFill/>
+        </p:spPr>
+        <p:txBody>
+          <a:bodyPr wrap="square" rtlCol="0">
+            <a:spAutoFit/>
+          </a:bodyPr>
+          <a:lstStyle/>
+          <a:p>
+            <a:r>
+              <a:rPr lang="en-US" sz="2800" b="1" dirty="0"/>
+              <a:t>8 Common Pitfalls of A/B Split Testing</a:t>
+            </a:r>
+          </a:p>
+        </p:txBody>
+      </p:sp>
+      <p:pic>
+        <p:nvPicPr>
+          <p:cNvPr id="2050" name="Picture 2">
+            <a:extLst>
+              <a:ext uri="{FF2B5EF4-FFF2-40B4-BE49-F238E27FC236}">
+                <a16:creationId xmlns:a16="http://schemas.microsoft.com/office/drawing/2014/main" id="{5F9B9272-7B54-3945-AAF1-0264787029C6}"/>
+              </a:ext>
+            </a:extLst>
+          </p:cNvPr>
+          <p:cNvPicPr>
+            <a:picLocks noChangeAspect="1" noChangeArrowheads="1"/>
+          </p:cNvPicPr>
+          <p:nvPr/>
+        </p:nvPicPr>
+        <p:blipFill>
+          <a:blip r:embed="rId3">
+            <a:extLst>
+              <a:ext uri="{28A0092B-C50C-407E-A947-70E740481C1C}">
+                <a14:useLocalDpi xmlns:a14="http://schemas.microsoft.com/office/drawing/2010/main"/>
+              </a:ext>
+            </a:extLst>
+          </a:blip>
+          <a:srcRect/>
+          <a:stretch>
+            <a:fillRect/>
+          </a:stretch>
+        </p:blipFill>
+        <p:spPr bwMode="auto">
+          <a:xfrm>
+            <a:off x="9092869" y="1339438"/>
+            <a:ext cx="2794000" cy="1866900"/>
+          </a:xfrm>
+          <a:prstGeom prst="rect">
+            <a:avLst/>
+          </a:prstGeom>
+          <a:noFill/>
+          <a:extLst>
+            <a:ext uri="{909E8E84-426E-40DD-AFC4-6F175D3DCCD1}">
+              <a14:hiddenFill xmlns:a14="http://schemas.microsoft.com/office/drawing/2010/main">
+                <a:solidFill>
+                  <a:srgbClr val="FFFFFF"/>
+                </a:solidFill>
+              </a14:hiddenFill>
+            </a:ext>
+          </a:extLst>
+        </p:spPr>
+      </p:pic>
+      <p:sp>
+        <p:nvSpPr>
+          <p:cNvPr id="4" name="TextBox 3">
+            <a:extLst>
+              <a:ext uri="{FF2B5EF4-FFF2-40B4-BE49-F238E27FC236}">
+                <a16:creationId xmlns:a16="http://schemas.microsoft.com/office/drawing/2014/main" id="{68BA55EB-04A6-594B-B052-252EF52A6171}"/>
+              </a:ext>
+            </a:extLst>
+          </p:cNvPr>
+          <p:cNvSpPr txBox="1"/>
+          <p:nvPr/>
+        </p:nvSpPr>
+        <p:spPr>
+          <a:xfrm>
+            <a:off x="9429008" y="3206338"/>
+            <a:ext cx="2624116" cy="1569660"/>
+          </a:xfrm>
+          <a:prstGeom prst="rect">
+            <a:avLst/>
+          </a:prstGeom>
+          <a:noFill/>
+        </p:spPr>
+        <p:txBody>
+          <a:bodyPr wrap="square" rtlCol="0">
+            <a:spAutoFit/>
+          </a:bodyPr>
+          <a:lstStyle/>
+          <a:p>
+            <a:r>
+              <a:rPr lang="en-US" sz="1600" b="1" dirty="0">
+                <a:solidFill>
+                  <a:srgbClr val="FF0000"/>
+                </a:solidFill>
+              </a:rPr>
+              <a:t>Simpson's paradox</a:t>
+            </a:r>
+            <a:r>
+              <a:rPr lang="en-US" sz="1600" dirty="0"/>
+              <a:t>: a positive trend appears for two separate groups, whereas a negative trend appears when the groups are combined.</a:t>
+            </a:r>
+          </a:p>
+        </p:txBody>
+      </p:sp>
+    </p:spTree>
+    <p:extLst>
+      <p:ext uri="{BB962C8B-B14F-4D97-AF65-F5344CB8AC3E}">
+        <p14:creationId xmlns:p14="http://schemas.microsoft.com/office/powerpoint/2010/main" val="418583824"/>
+      </p:ext>
+    </p:extLst>
+  </p:cSld>
+  <p:clrMapOvr>
+    <a:masterClrMapping/>
+  </p:clrMapOvr>
+</p:sld>
+</file>
+
+<file path=ppt/slides/slide5.xml><?xml version="1.0" encoding="utf-8"?>
 <p:sld xmlns:a="http://schemas.openxmlformats.org/drawingml/2006/main" xmlns:r="http://schemas.openxmlformats.org/officeDocument/2006/relationships" xmlns:p="http://schemas.openxmlformats.org/presentationml/2006/main">
   <p:cSld>
     <p:spTree>
@@ -7942,7 +8783,7 @@
 </p:sld>
 </file>
 
-<file path=ppt/slides/slide4.xml><?xml version="1.0" encoding="utf-8"?>
+<file path=ppt/slides/slide6.xml><?xml version="1.0" encoding="utf-8"?>
 <p:sld xmlns:a="http://schemas.openxmlformats.org/drawingml/2006/main" xmlns:r="http://schemas.openxmlformats.org/officeDocument/2006/relationships" xmlns:p="http://schemas.openxmlformats.org/presentationml/2006/main">
   <p:cSld>
     <p:spTree>
@@ -8390,7 +9231,7 @@
 </p:sld>
 </file>
 
-<file path=ppt/slides/slide5.xml><?xml version="1.0" encoding="utf-8"?>
+<file path=ppt/slides/slide7.xml><?xml version="1.0" encoding="utf-8"?>
 <p:sld xmlns:a="http://schemas.openxmlformats.org/drawingml/2006/main" xmlns:r="http://schemas.openxmlformats.org/officeDocument/2006/relationships" xmlns:p="http://schemas.openxmlformats.org/presentationml/2006/main">
   <p:cSld>
     <p:spTree>
@@ -8962,7 +9803,7 @@
 </p:sld>
 </file>
 
-<file path=ppt/slides/slide6.xml><?xml version="1.0" encoding="utf-8"?>
+<file path=ppt/slides/slide8.xml><?xml version="1.0" encoding="utf-8"?>
 <p:sld xmlns:a="http://schemas.openxmlformats.org/drawingml/2006/main" xmlns:r="http://schemas.openxmlformats.org/officeDocument/2006/relationships" xmlns:p="http://schemas.openxmlformats.org/presentationml/2006/main">
   <p:cSld>
     <p:spTree>
